--- a/class/cloud_infra_mgmt/10주차_Terraform_IaC심화/01_강의자료/3차시_GitHub연동과원격실행확인.pptx
+++ b/class/cloud_infra_mgmt/10주차_Terraform_IaC심화/01_강의자료/3차시_GitHub연동과원격실행확인.pptx
@@ -9806,7 +9806,7 @@
               </a:lnSpc>
             </a:pPr>
             <a:r>
-              <a:rPr sz="1500" b="1">
+              <a:rPr sz="1700" b="1">
                 <a:solidFill>
                   <a:srgbClr val="0D9488"/>
                 </a:solidFill>
@@ -9815,7 +9815,7 @@
               <a:t>●  </a:t>
             </a:r>
             <a:r>
-              <a:rPr sz="1500" b="0">
+              <a:rPr sz="1700" b="0">
                 <a:solidFill>
                   <a:srgbClr val="222733"/>
                 </a:solidFill>
@@ -9831,7 +9831,7 @@
               </a:lnSpc>
             </a:pPr>
             <a:r>
-              <a:rPr sz="1500" b="1">
+              <a:rPr sz="1700" b="1">
                 <a:solidFill>
                   <a:srgbClr val="0D9488"/>
                 </a:solidFill>
@@ -9840,7 +9840,7 @@
               <a:t>●  </a:t>
             </a:r>
             <a:r>
-              <a:rPr sz="1500" b="0">
+              <a:rPr sz="1700" b="0">
                 <a:solidFill>
                   <a:srgbClr val="222733"/>
                 </a:solidFill>
@@ -9856,7 +9856,7 @@
               </a:lnSpc>
             </a:pPr>
             <a:r>
-              <a:rPr sz="1500" b="1">
+              <a:rPr sz="1700" b="1">
                 <a:solidFill>
                   <a:srgbClr val="0D9488"/>
                 </a:solidFill>
@@ -9865,7 +9865,7 @@
               <a:t>●  </a:t>
             </a:r>
             <a:r>
-              <a:rPr sz="1500" b="0">
+              <a:rPr sz="1700" b="0">
                 <a:solidFill>
                   <a:srgbClr val="222733"/>
                 </a:solidFill>

--- a/class/cloud_infra_mgmt/10주차_Terraform_IaC심화/01_강의자료/3차시_GitHub연동과원격실행확인.pptx
+++ b/class/cloud_infra_mgmt/10주차_Terraform_IaC심화/01_강의자료/3차시_GitHub연동과원격실행확인.pptx
@@ -5376,7 +5376,7 @@
           <a:p>
             <a:pPr>
               <a:lnSpc>
-                <a:spcPct val="115000"/>
+                <a:spcPct val="149500"/>
               </a:lnSpc>
             </a:pPr>
             <a:r>
@@ -5401,7 +5401,7 @@
           <a:p>
             <a:pPr>
               <a:lnSpc>
-                <a:spcPct val="115000"/>
+                <a:spcPct val="149500"/>
               </a:lnSpc>
             </a:pPr>
             <a:r>
@@ -5426,7 +5426,7 @@
           <a:p>
             <a:pPr>
               <a:lnSpc>
-                <a:spcPct val="115000"/>
+                <a:spcPct val="149500"/>
               </a:lnSpc>
             </a:pPr>
             <a:r>
@@ -5817,7 +5817,7 @@
           <a:p>
             <a:pPr>
               <a:lnSpc>
-                <a:spcPct val="115000"/>
+                <a:spcPct val="149500"/>
               </a:lnSpc>
             </a:pPr>
             <a:r>
@@ -5842,7 +5842,7 @@
           <a:p>
             <a:pPr>
               <a:lnSpc>
-                <a:spcPct val="115000"/>
+                <a:spcPct val="149500"/>
               </a:lnSpc>
             </a:pPr>
             <a:r>
@@ -5867,7 +5867,7 @@
           <a:p>
             <a:pPr>
               <a:lnSpc>
-                <a:spcPct val="115000"/>
+                <a:spcPct val="149500"/>
               </a:lnSpc>
             </a:pPr>
             <a:r>
@@ -5892,7 +5892,7 @@
           <a:p>
             <a:pPr>
               <a:lnSpc>
-                <a:spcPct val="115000"/>
+                <a:spcPct val="149500"/>
               </a:lnSpc>
             </a:pPr>
             <a:r>
@@ -7400,16 +7400,104 @@
       </p:sp>
       <p:sp>
         <p:nvSpPr>
-          <p:cNvPr id="7" name="Isosceles Triangle 6"/>
+          <p:cNvPr id="7" name="Rectangle 6"/>
           <p:cNvSpPr/>
           <p:nvPr/>
         </p:nvSpPr>
         <p:spPr>
-          <a:xfrm rot="5400000">
-            <a:off x="3495751" y="1673352"/>
-            <a:ext cx="146304" cy="146304"/>
-          </a:xfrm>
-          <a:prstGeom prst="triangle">
+          <a:xfrm>
+            <a:off x="5096865" y="1730959"/>
+            <a:ext cx="1995220" cy="31089"/>
+          </a:xfrm>
+          <a:prstGeom prst="rect">
+            <a:avLst/>
+          </a:prstGeom>
+          <a:solidFill>
+            <a:srgbClr val="14B8A6"/>
+          </a:solidFill>
+          <a:ln>
+            <a:noFill/>
+          </a:ln>
+          <a:effectLst/>
+        </p:spPr>
+        <p:style>
+          <a:lnRef idx="1">
+            <a:schemeClr val="accent1"/>
+          </a:lnRef>
+          <a:fillRef idx="3">
+            <a:schemeClr val="accent1"/>
+          </a:fillRef>
+          <a:effectRef idx="2">
+            <a:schemeClr val="accent1"/>
+          </a:effectRef>
+          <a:fontRef idx="minor">
+            <a:schemeClr val="lt1"/>
+          </a:fontRef>
+        </p:style>
+        <p:txBody>
+          <a:bodyPr rtlCol="0" anchor="ctr"/>
+          <a:lstStyle/>
+          <a:p>
+            <a:pPr algn="ctr"/>
+          </a:p>
+        </p:txBody>
+      </p:sp>
+      <p:sp>
+        <p:nvSpPr>
+          <p:cNvPr id="8" name="Rectangle 7"/>
+          <p:cNvSpPr/>
+          <p:nvPr/>
+        </p:nvSpPr>
+        <p:spPr>
+          <a:xfrm>
+            <a:off x="7622438" y="1730959"/>
+            <a:ext cx="1995220" cy="31089"/>
+          </a:xfrm>
+          <a:prstGeom prst="rect">
+            <a:avLst/>
+          </a:prstGeom>
+          <a:solidFill>
+            <a:srgbClr val="14B8A6"/>
+          </a:solidFill>
+          <a:ln>
+            <a:noFill/>
+          </a:ln>
+          <a:effectLst/>
+        </p:spPr>
+        <p:style>
+          <a:lnRef idx="1">
+            <a:schemeClr val="accent1"/>
+          </a:lnRef>
+          <a:fillRef idx="3">
+            <a:schemeClr val="accent1"/>
+          </a:fillRef>
+          <a:effectRef idx="2">
+            <a:schemeClr val="accent1"/>
+          </a:effectRef>
+          <a:fontRef idx="minor">
+            <a:schemeClr val="lt1"/>
+          </a:fontRef>
+        </p:style>
+        <p:txBody>
+          <a:bodyPr rtlCol="0" anchor="ctr"/>
+          <a:lstStyle/>
+          <a:p>
+            <a:pPr algn="ctr"/>
+          </a:p>
+        </p:txBody>
+      </p:sp>
+      <p:sp>
+        <p:nvSpPr>
+          <p:cNvPr id="9" name="Oval 8"/>
+          <p:cNvSpPr/>
+          <p:nvPr/>
+        </p:nvSpPr>
+        <p:spPr>
+          <a:xfrm>
+            <a:off x="2040940" y="1481328"/>
+            <a:ext cx="530352" cy="530352"/>
+          </a:xfrm>
+          <a:prstGeom prst="ellipse">
             <a:avLst/>
           </a:prstGeom>
           <a:solidFill>
@@ -7444,227 +7532,7 @@
       </p:sp>
       <p:sp>
         <p:nvSpPr>
-          <p:cNvPr id="8" name="Rectangle 7"/>
-          <p:cNvSpPr/>
-          <p:nvPr/>
-        </p:nvSpPr>
-        <p:spPr>
-          <a:xfrm>
-            <a:off x="5096865" y="1730959"/>
-            <a:ext cx="1995220" cy="31089"/>
-          </a:xfrm>
-          <a:prstGeom prst="rect">
-            <a:avLst/>
-          </a:prstGeom>
-          <a:solidFill>
-            <a:srgbClr val="14B8A6"/>
-          </a:solidFill>
-          <a:ln>
-            <a:noFill/>
-          </a:ln>
-          <a:effectLst/>
-        </p:spPr>
-        <p:style>
-          <a:lnRef idx="1">
-            <a:schemeClr val="accent1"/>
-          </a:lnRef>
-          <a:fillRef idx="3">
-            <a:schemeClr val="accent1"/>
-          </a:fillRef>
-          <a:effectRef idx="2">
-            <a:schemeClr val="accent1"/>
-          </a:effectRef>
-          <a:fontRef idx="minor">
-            <a:schemeClr val="lt1"/>
-          </a:fontRef>
-        </p:style>
-        <p:txBody>
-          <a:bodyPr rtlCol="0" anchor="ctr"/>
-          <a:lstStyle/>
-          <a:p>
-            <a:pPr algn="ctr"/>
-          </a:p>
-        </p:txBody>
-      </p:sp>
-      <p:sp>
-        <p:nvSpPr>
-          <p:cNvPr id="9" name="Isosceles Triangle 8"/>
-          <p:cNvSpPr/>
-          <p:nvPr/>
-        </p:nvSpPr>
-        <p:spPr>
-          <a:xfrm rot="5400000">
-            <a:off x="6021324" y="1673352"/>
-            <a:ext cx="146304" cy="146304"/>
-          </a:xfrm>
-          <a:prstGeom prst="triangle">
-            <a:avLst/>
-          </a:prstGeom>
-          <a:solidFill>
-            <a:srgbClr val="0D9488"/>
-          </a:solidFill>
-          <a:ln>
-            <a:noFill/>
-          </a:ln>
-          <a:effectLst/>
-        </p:spPr>
-        <p:style>
-          <a:lnRef idx="1">
-            <a:schemeClr val="accent1"/>
-          </a:lnRef>
-          <a:fillRef idx="3">
-            <a:schemeClr val="accent1"/>
-          </a:fillRef>
-          <a:effectRef idx="2">
-            <a:schemeClr val="accent1"/>
-          </a:effectRef>
-          <a:fontRef idx="minor">
-            <a:schemeClr val="lt1"/>
-          </a:fontRef>
-        </p:style>
-        <p:txBody>
-          <a:bodyPr rtlCol="0" anchor="ctr"/>
-          <a:lstStyle/>
-          <a:p>
-            <a:pPr algn="ctr"/>
-          </a:p>
-        </p:txBody>
-      </p:sp>
-      <p:sp>
-        <p:nvSpPr>
-          <p:cNvPr id="10" name="Rectangle 9"/>
-          <p:cNvSpPr/>
-          <p:nvPr/>
-        </p:nvSpPr>
-        <p:spPr>
-          <a:xfrm>
-            <a:off x="7622438" y="1730959"/>
-            <a:ext cx="1995220" cy="31089"/>
-          </a:xfrm>
-          <a:prstGeom prst="rect">
-            <a:avLst/>
-          </a:prstGeom>
-          <a:solidFill>
-            <a:srgbClr val="14B8A6"/>
-          </a:solidFill>
-          <a:ln>
-            <a:noFill/>
-          </a:ln>
-          <a:effectLst/>
-        </p:spPr>
-        <p:style>
-          <a:lnRef idx="1">
-            <a:schemeClr val="accent1"/>
-          </a:lnRef>
-          <a:fillRef idx="3">
-            <a:schemeClr val="accent1"/>
-          </a:fillRef>
-          <a:effectRef idx="2">
-            <a:schemeClr val="accent1"/>
-          </a:effectRef>
-          <a:fontRef idx="minor">
-            <a:schemeClr val="lt1"/>
-          </a:fontRef>
-        </p:style>
-        <p:txBody>
-          <a:bodyPr rtlCol="0" anchor="ctr"/>
-          <a:lstStyle/>
-          <a:p>
-            <a:pPr algn="ctr"/>
-          </a:p>
-        </p:txBody>
-      </p:sp>
-      <p:sp>
-        <p:nvSpPr>
-          <p:cNvPr id="11" name="Isosceles Triangle 10"/>
-          <p:cNvSpPr/>
-          <p:nvPr/>
-        </p:nvSpPr>
-        <p:spPr>
-          <a:xfrm rot="5400000">
-            <a:off x="8546896" y="1673352"/>
-            <a:ext cx="146304" cy="146304"/>
-          </a:xfrm>
-          <a:prstGeom prst="triangle">
-            <a:avLst/>
-          </a:prstGeom>
-          <a:solidFill>
-            <a:srgbClr val="0D9488"/>
-          </a:solidFill>
-          <a:ln>
-            <a:noFill/>
-          </a:ln>
-          <a:effectLst/>
-        </p:spPr>
-        <p:style>
-          <a:lnRef idx="1">
-            <a:schemeClr val="accent1"/>
-          </a:lnRef>
-          <a:fillRef idx="3">
-            <a:schemeClr val="accent1"/>
-          </a:fillRef>
-          <a:effectRef idx="2">
-            <a:schemeClr val="accent1"/>
-          </a:effectRef>
-          <a:fontRef idx="minor">
-            <a:schemeClr val="lt1"/>
-          </a:fontRef>
-        </p:style>
-        <p:txBody>
-          <a:bodyPr rtlCol="0" anchor="ctr"/>
-          <a:lstStyle/>
-          <a:p>
-            <a:pPr algn="ctr"/>
-          </a:p>
-        </p:txBody>
-      </p:sp>
-      <p:sp>
-        <p:nvSpPr>
-          <p:cNvPr id="12" name="Oval 11"/>
-          <p:cNvSpPr/>
-          <p:nvPr/>
-        </p:nvSpPr>
-        <p:spPr>
-          <a:xfrm>
-            <a:off x="2040940" y="1481328"/>
-            <a:ext cx="530352" cy="530352"/>
-          </a:xfrm>
-          <a:prstGeom prst="ellipse">
-            <a:avLst/>
-          </a:prstGeom>
-          <a:solidFill>
-            <a:srgbClr val="0D9488"/>
-          </a:solidFill>
-          <a:ln>
-            <a:noFill/>
-          </a:ln>
-          <a:effectLst/>
-        </p:spPr>
-        <p:style>
-          <a:lnRef idx="1">
-            <a:schemeClr val="accent1"/>
-          </a:lnRef>
-          <a:fillRef idx="3">
-            <a:schemeClr val="accent1"/>
-          </a:fillRef>
-          <a:effectRef idx="2">
-            <a:schemeClr val="accent1"/>
-          </a:effectRef>
-          <a:fontRef idx="minor">
-            <a:schemeClr val="lt1"/>
-          </a:fontRef>
-        </p:style>
-        <p:txBody>
-          <a:bodyPr rtlCol="0" anchor="ctr"/>
-          <a:lstStyle/>
-          <a:p>
-            <a:pPr algn="ctr"/>
-          </a:p>
-        </p:txBody>
-      </p:sp>
-      <p:sp>
-        <p:nvSpPr>
-          <p:cNvPr id="13" name="TextBox 12"/>
+          <p:cNvPr id="10" name="TextBox 9"/>
           <p:cNvSpPr txBox="1"/>
           <p:nvPr/>
         </p:nvSpPr>
@@ -7699,7 +7567,7 @@
       </p:sp>
       <p:sp>
         <p:nvSpPr>
-          <p:cNvPr id="14" name="Rounded Rectangle 13"/>
+          <p:cNvPr id="11" name="Rounded Rectangle 10"/>
           <p:cNvSpPr/>
           <p:nvPr/>
         </p:nvSpPr>
@@ -7747,7 +7615,7 @@
       </p:sp>
       <p:sp>
         <p:nvSpPr>
-          <p:cNvPr id="15" name="TextBox 14"/>
+          <p:cNvPr id="12" name="TextBox 11"/>
           <p:cNvSpPr txBox="1"/>
           <p:nvPr/>
         </p:nvSpPr>
@@ -7782,7 +7650,7 @@
       </p:sp>
       <p:sp>
         <p:nvSpPr>
-          <p:cNvPr id="16" name="TextBox 15"/>
+          <p:cNvPr id="13" name="TextBox 12"/>
           <p:cNvSpPr txBox="1"/>
           <p:nvPr/>
         </p:nvSpPr>
@@ -7821,7 +7689,7 @@
       </p:sp>
       <p:sp>
         <p:nvSpPr>
-          <p:cNvPr id="17" name="Oval 16"/>
+          <p:cNvPr id="14" name="Oval 13"/>
           <p:cNvSpPr/>
           <p:nvPr/>
         </p:nvSpPr>
@@ -7865,7 +7733,7 @@
       </p:sp>
       <p:sp>
         <p:nvSpPr>
-          <p:cNvPr id="18" name="TextBox 17"/>
+          <p:cNvPr id="15" name="TextBox 14"/>
           <p:cNvSpPr txBox="1"/>
           <p:nvPr/>
         </p:nvSpPr>
@@ -7900,7 +7768,7 @@
       </p:sp>
       <p:sp>
         <p:nvSpPr>
-          <p:cNvPr id="19" name="Rounded Rectangle 18"/>
+          <p:cNvPr id="16" name="Rounded Rectangle 15"/>
           <p:cNvSpPr/>
           <p:nvPr/>
         </p:nvSpPr>
@@ -7948,7 +7816,7 @@
       </p:sp>
       <p:sp>
         <p:nvSpPr>
-          <p:cNvPr id="20" name="TextBox 19"/>
+          <p:cNvPr id="17" name="TextBox 16"/>
           <p:cNvSpPr txBox="1"/>
           <p:nvPr/>
         </p:nvSpPr>
@@ -7983,7 +7851,7 @@
       </p:sp>
       <p:sp>
         <p:nvSpPr>
-          <p:cNvPr id="21" name="TextBox 20"/>
+          <p:cNvPr id="18" name="TextBox 17"/>
           <p:cNvSpPr txBox="1"/>
           <p:nvPr/>
         </p:nvSpPr>
@@ -8022,7 +7890,7 @@
       </p:sp>
       <p:sp>
         <p:nvSpPr>
-          <p:cNvPr id="22" name="Oval 21"/>
+          <p:cNvPr id="19" name="Oval 18"/>
           <p:cNvSpPr/>
           <p:nvPr/>
         </p:nvSpPr>
@@ -8066,7 +7934,7 @@
       </p:sp>
       <p:sp>
         <p:nvSpPr>
-          <p:cNvPr id="23" name="TextBox 22"/>
+          <p:cNvPr id="20" name="TextBox 19"/>
           <p:cNvSpPr txBox="1"/>
           <p:nvPr/>
         </p:nvSpPr>
@@ -8101,7 +7969,7 @@
       </p:sp>
       <p:sp>
         <p:nvSpPr>
-          <p:cNvPr id="24" name="Rounded Rectangle 23"/>
+          <p:cNvPr id="21" name="Rounded Rectangle 20"/>
           <p:cNvSpPr/>
           <p:nvPr/>
         </p:nvSpPr>
@@ -8149,7 +8017,7 @@
       </p:sp>
       <p:sp>
         <p:nvSpPr>
-          <p:cNvPr id="25" name="TextBox 24"/>
+          <p:cNvPr id="22" name="TextBox 21"/>
           <p:cNvSpPr txBox="1"/>
           <p:nvPr/>
         </p:nvSpPr>
@@ -8184,7 +8052,7 @@
       </p:sp>
       <p:sp>
         <p:nvSpPr>
-          <p:cNvPr id="26" name="TextBox 25"/>
+          <p:cNvPr id="23" name="TextBox 22"/>
           <p:cNvSpPr txBox="1"/>
           <p:nvPr/>
         </p:nvSpPr>
@@ -8223,7 +8091,7 @@
       </p:sp>
       <p:sp>
         <p:nvSpPr>
-          <p:cNvPr id="27" name="Oval 26"/>
+          <p:cNvPr id="24" name="Oval 23"/>
           <p:cNvSpPr/>
           <p:nvPr/>
         </p:nvSpPr>
@@ -8267,7 +8135,7 @@
       </p:sp>
       <p:sp>
         <p:nvSpPr>
-          <p:cNvPr id="28" name="TextBox 27"/>
+          <p:cNvPr id="25" name="TextBox 24"/>
           <p:cNvSpPr txBox="1"/>
           <p:nvPr/>
         </p:nvSpPr>
@@ -8302,7 +8170,7 @@
       </p:sp>
       <p:sp>
         <p:nvSpPr>
-          <p:cNvPr id="29" name="Rounded Rectangle 28"/>
+          <p:cNvPr id="26" name="Rounded Rectangle 25"/>
           <p:cNvSpPr/>
           <p:nvPr/>
         </p:nvSpPr>
@@ -8350,7 +8218,7 @@
       </p:sp>
       <p:sp>
         <p:nvSpPr>
-          <p:cNvPr id="30" name="TextBox 29"/>
+          <p:cNvPr id="27" name="TextBox 26"/>
           <p:cNvSpPr txBox="1"/>
           <p:nvPr/>
         </p:nvSpPr>
@@ -8385,7 +8253,7 @@
       </p:sp>
       <p:sp>
         <p:nvSpPr>
-          <p:cNvPr id="31" name="TextBox 30"/>
+          <p:cNvPr id="28" name="TextBox 27"/>
           <p:cNvSpPr txBox="1"/>
           <p:nvPr/>
         </p:nvSpPr>
@@ -8424,7 +8292,7 @@
       </p:sp>
       <p:sp>
         <p:nvSpPr>
-          <p:cNvPr id="32" name="TextBox 31"/>
+          <p:cNvPr id="29" name="TextBox 28"/>
           <p:cNvSpPr txBox="1"/>
           <p:nvPr/>
         </p:nvSpPr>
@@ -8459,7 +8327,7 @@
       </p:sp>
       <p:sp>
         <p:nvSpPr>
-          <p:cNvPr id="33" name="TextBox 32"/>
+          <p:cNvPr id="30" name="TextBox 29"/>
           <p:cNvSpPr txBox="1"/>
           <p:nvPr/>
         </p:nvSpPr>
@@ -8494,7 +8362,7 @@
       </p:sp>
       <p:sp>
         <p:nvSpPr>
-          <p:cNvPr id="34" name="Rectangle 33"/>
+          <p:cNvPr id="31" name="Rectangle 30"/>
           <p:cNvSpPr/>
           <p:nvPr/>
         </p:nvSpPr>
@@ -9018,7 +8886,7 @@
           <a:p>
             <a:pPr>
               <a:lnSpc>
-                <a:spcPct val="115000"/>
+                <a:spcPct val="149500"/>
               </a:lnSpc>
             </a:pPr>
             <a:r>
@@ -9043,7 +8911,7 @@
           <a:p>
             <a:pPr>
               <a:lnSpc>
-                <a:spcPct val="115000"/>
+                <a:spcPct val="149500"/>
               </a:lnSpc>
             </a:pPr>
             <a:r>
@@ -9068,7 +8936,7 @@
           <a:p>
             <a:pPr>
               <a:lnSpc>
-                <a:spcPct val="115000"/>
+                <a:spcPct val="149500"/>
               </a:lnSpc>
             </a:pPr>
             <a:r>
@@ -9802,7 +9670,7 @@
           <a:p>
             <a:pPr>
               <a:lnSpc>
-                <a:spcPct val="115000"/>
+                <a:spcPct val="149500"/>
               </a:lnSpc>
             </a:pPr>
             <a:r>
@@ -9827,7 +9695,7 @@
           <a:p>
             <a:pPr>
               <a:lnSpc>
-                <a:spcPct val="115000"/>
+                <a:spcPct val="149500"/>
               </a:lnSpc>
             </a:pPr>
             <a:r>
@@ -9852,7 +9720,7 @@
           <a:p>
             <a:pPr>
               <a:lnSpc>
-                <a:spcPct val="115000"/>
+                <a:spcPct val="149500"/>
               </a:lnSpc>
             </a:pPr>
             <a:r>
@@ -10357,7 +10225,7 @@
           <a:p>
             <a:pPr>
               <a:lnSpc>
-                <a:spcPct val="115000"/>
+                <a:spcPct val="149500"/>
               </a:lnSpc>
             </a:pPr>
             <a:r>
@@ -10382,7 +10250,7 @@
           <a:p>
             <a:pPr>
               <a:lnSpc>
-                <a:spcPct val="115000"/>
+                <a:spcPct val="149500"/>
               </a:lnSpc>
             </a:pPr>
             <a:r>
@@ -10407,7 +10275,7 @@
           <a:p>
             <a:pPr>
               <a:lnSpc>
-                <a:spcPct val="115000"/>
+                <a:spcPct val="149500"/>
               </a:lnSpc>
             </a:pPr>
             <a:r>
@@ -10432,7 +10300,7 @@
           <a:p>
             <a:pPr>
               <a:lnSpc>
-                <a:spcPct val="115000"/>
+                <a:spcPct val="149500"/>
               </a:lnSpc>
             </a:pPr>
             <a:r>
@@ -10457,7 +10325,7 @@
           <a:p>
             <a:pPr>
               <a:lnSpc>
-                <a:spcPct val="115000"/>
+                <a:spcPct val="149500"/>
               </a:lnSpc>
             </a:pPr>
             <a:r>
@@ -10482,7 +10350,7 @@
           <a:p>
             <a:pPr>
               <a:lnSpc>
-                <a:spcPct val="115000"/>
+                <a:spcPct val="149500"/>
               </a:lnSpc>
             </a:pPr>
             <a:r>
@@ -10507,7 +10375,7 @@
           <a:p>
             <a:pPr>
               <a:lnSpc>
-                <a:spcPct val="115000"/>
+                <a:spcPct val="149500"/>
               </a:lnSpc>
             </a:pPr>
             <a:r>
@@ -10898,7 +10766,7 @@
           <a:p>
             <a:pPr>
               <a:lnSpc>
-                <a:spcPct val="115000"/>
+                <a:spcPct val="149500"/>
               </a:lnSpc>
             </a:pPr>
             <a:r>
@@ -10923,7 +10791,7 @@
           <a:p>
             <a:pPr>
               <a:lnSpc>
-                <a:spcPct val="115000"/>
+                <a:spcPct val="149500"/>
               </a:lnSpc>
             </a:pPr>
             <a:r>
@@ -10948,7 +10816,7 @@
           <a:p>
             <a:pPr>
               <a:lnSpc>
-                <a:spcPct val="115000"/>
+                <a:spcPct val="149500"/>
               </a:lnSpc>
             </a:pPr>
             <a:r>
@@ -10973,7 +10841,7 @@
           <a:p>
             <a:pPr>
               <a:lnSpc>
-                <a:spcPct val="115000"/>
+                <a:spcPct val="149500"/>
               </a:lnSpc>
             </a:pPr>
             <a:r>

--- a/class/cloud_infra_mgmt/10주차_Terraform_IaC심화/01_강의자료/3차시_GitHub연동과원격실행확인.pptx
+++ b/class/cloud_infra_mgmt/10주차_Terraform_IaC심화/01_강의자료/3차시_GitHub연동과원격실행확인.pptx
@@ -5012,6 +5012,8 @@
                   <a:srgbClr val="14B8A6"/>
                 </a:solidFill>
                 <a:latin typeface="맑은 고딕"/>
+                <a:ea typeface="맑은 고딕"/>
+                <a:cs typeface="맑은 고딕"/>
               </a:rPr>
               <a:t>클라우드인프라관리  ·  10주차 3차시</a:t>
             </a:r>
@@ -5047,6 +5049,8 @@
                   <a:srgbClr val="FFFFFF"/>
                 </a:solidFill>
                 <a:latin typeface="맑은 고딕"/>
+                <a:ea typeface="맑은 고딕"/>
+                <a:cs typeface="맑은 고딕"/>
               </a:rPr>
               <a:t>GitHub 연동과 원격 실행 확인</a:t>
             </a:r>
@@ -5082,6 +5086,8 @@
                   <a:srgbClr val="C9D3E6"/>
                 </a:solidFill>
                 <a:latin typeface="맑은 고딕"/>
+                <a:ea typeface="맑은 고딕"/>
+                <a:cs typeface="맑은 고딕"/>
               </a:rPr>
               <a:t>random_pet으로 하이브리드 GitOps 완성하기</a:t>
             </a:r>
@@ -5117,6 +5123,8 @@
                   <a:srgbClr val="FFFFFF"/>
                 </a:solidFill>
                 <a:latin typeface="맑은 고딕"/>
+                <a:ea typeface="맑은 고딕"/>
+                <a:cs typeface="맑은 고딕"/>
               </a:rPr>
               <a:t>영남이공대학교 김지윤교수</a:t>
             </a:r>
@@ -5276,6 +5284,8 @@
                   <a:srgbClr val="14213D"/>
                 </a:solidFill>
                 <a:latin typeface="맑은 고딕"/>
+                <a:ea typeface="맑은 고딕"/>
+                <a:cs typeface="맑은 고딕"/>
               </a:rPr>
               <a:t>03</a:t>
             </a:r>
@@ -5311,6 +5321,8 @@
                   <a:srgbClr val="14B8A6"/>
                 </a:solidFill>
                 <a:latin typeface="맑은 고딕"/>
+                <a:ea typeface="맑은 고딕"/>
+                <a:cs typeface="맑은 고딕"/>
               </a:rPr>
               <a:t>실습 안내</a:t>
             </a:r>
@@ -5346,6 +5358,8 @@
                   <a:srgbClr val="FFFFFF"/>
                 </a:solidFill>
                 <a:latin typeface="맑은 고딕"/>
+                <a:ea typeface="맑은 고딕"/>
+                <a:cs typeface="맑은 고딕"/>
               </a:rPr>
               <a:t>Killercoda — 원격 실행 결과 확인</a:t>
             </a:r>
@@ -5385,6 +5399,8 @@
                   <a:srgbClr val="0D9488"/>
                 </a:solidFill>
                 <a:latin typeface="맑은 고딕"/>
+                <a:ea typeface="맑은 고딕"/>
+                <a:cs typeface="맑은 고딕"/>
               </a:rPr>
               <a:t>●  </a:t>
             </a:r>
@@ -5394,6 +5410,8 @@
                   <a:srgbClr val="222733"/>
                 </a:solidFill>
                 <a:latin typeface="맑은 고딕"/>
+                <a:ea typeface="맑은 고딕"/>
+                <a:cs typeface="맑은 고딕"/>
               </a:rPr>
               <a:t>교수자가 미리 연동해 둔 워크스페이스에서 실제 Runs 이력을 함께 살펴봄</a:t>
             </a:r>
@@ -5410,6 +5428,8 @@
                   <a:srgbClr val="0D9488"/>
                 </a:solidFill>
                 <a:latin typeface="맑은 고딕"/>
+                <a:ea typeface="맑은 고딕"/>
+                <a:cs typeface="맑은 고딕"/>
               </a:rPr>
               <a:t>●  </a:t>
             </a:r>
@@ -5419,6 +5439,8 @@
                   <a:srgbClr val="222733"/>
                 </a:solidFill>
                 <a:latin typeface="맑은 고딕"/>
+                <a:ea typeface="맑은 고딕"/>
+                <a:cs typeface="맑은 고딕"/>
               </a:rPr>
               <a:t>누가, 언제, 어떤 코드 변경으로 실행했는지 로그가 남는 것을 확인</a:t>
             </a:r>
@@ -5435,6 +5457,8 @@
                   <a:srgbClr val="0D9488"/>
                 </a:solidFill>
                 <a:latin typeface="맑은 고딕"/>
+                <a:ea typeface="맑은 고딕"/>
+                <a:cs typeface="맑은 고딕"/>
               </a:rPr>
               <a:t>●  </a:t>
             </a:r>
@@ -5444,6 +5468,8 @@
                   <a:srgbClr val="222733"/>
                 </a:solidFill>
                 <a:latin typeface="맑은 고딕"/>
+                <a:ea typeface="맑은 고딕"/>
+                <a:cs typeface="맑은 고딕"/>
               </a:rPr>
               <a:t>'원격 실행'이 실제로 무엇을 의미하는지 로그를 통해 체감</a:t>
             </a:r>
@@ -5479,6 +5505,8 @@
                   <a:srgbClr val="5B6373"/>
                 </a:solidFill>
                 <a:latin typeface="맑은 고딕"/>
+                <a:ea typeface="맑은 고딕"/>
+                <a:cs typeface="맑은 고딕"/>
               </a:rPr>
               <a:t>클라우드인프라관리  ·  10주차 3차시</a:t>
             </a:r>
@@ -5514,6 +5542,8 @@
                   <a:srgbClr val="5B6373"/>
                 </a:solidFill>
                 <a:latin typeface="맑은 고딕"/>
+                <a:ea typeface="맑은 고딕"/>
+                <a:cs typeface="맑은 고딕"/>
               </a:rPr>
               <a:t>10 / 13</a:t>
             </a:r>
@@ -5717,6 +5747,8 @@
                   <a:srgbClr val="14213D"/>
                 </a:solidFill>
                 <a:latin typeface="맑은 고딕"/>
+                <a:ea typeface="맑은 고딕"/>
+                <a:cs typeface="맑은 고딕"/>
               </a:rPr>
               <a:t>03</a:t>
             </a:r>
@@ -5752,6 +5784,8 @@
                   <a:srgbClr val="14B8A6"/>
                 </a:solidFill>
                 <a:latin typeface="맑은 고딕"/>
+                <a:ea typeface="맑은 고딕"/>
+                <a:cs typeface="맑은 고딕"/>
               </a:rPr>
               <a:t>실습 안내</a:t>
             </a:r>
@@ -5787,6 +5821,8 @@
                   <a:srgbClr val="FFFFFF"/>
                 </a:solidFill>
                 <a:latin typeface="맑은 고딕"/>
+                <a:ea typeface="맑은 고딕"/>
+                <a:cs typeface="맑은 고딕"/>
               </a:rPr>
               <a:t>VM 안내 — 9~10주 통합 제출</a:t>
             </a:r>
@@ -5826,6 +5862,8 @@
                   <a:srgbClr val="0D9488"/>
                 </a:solidFill>
                 <a:latin typeface="맑은 고딕"/>
+                <a:ea typeface="맑은 고딕"/>
+                <a:cs typeface="맑은 고딕"/>
               </a:rPr>
               <a:t>●  </a:t>
             </a:r>
@@ -5835,6 +5873,8 @@
                   <a:srgbClr val="222733"/>
                 </a:solidFill>
                 <a:latin typeface="맑은 고딕"/>
+                <a:ea typeface="맑은 고딕"/>
+                <a:cs typeface="맑은 고딕"/>
               </a:rPr>
               <a:t>2차시에 만든 워크스페이스에 random_pet 예제 코드로 terraform apply 실행</a:t>
             </a:r>
@@ -5851,6 +5891,8 @@
                   <a:srgbClr val="0D9488"/>
                 </a:solidFill>
                 <a:latin typeface="맑은 고딕"/>
+                <a:ea typeface="맑은 고딕"/>
+                <a:cs typeface="맑은 고딕"/>
               </a:rPr>
               <a:t>●  </a:t>
             </a:r>
@@ -5860,6 +5902,8 @@
                   <a:srgbClr val="222733"/>
                 </a:solidFill>
                 <a:latin typeface="맑은 고딕"/>
+                <a:ea typeface="맑은 고딕"/>
+                <a:cs typeface="맑은 고딕"/>
               </a:rPr>
               <a:t>terraform output 결과(pet_name) 캡처</a:t>
             </a:r>
@@ -5876,6 +5920,8 @@
                   <a:srgbClr val="0D9488"/>
                 </a:solidFill>
                 <a:latin typeface="맑은 고딕"/>
+                <a:ea typeface="맑은 고딕"/>
+                <a:cs typeface="맑은 고딕"/>
               </a:rPr>
               <a:t>●  </a:t>
             </a:r>
@@ -5885,6 +5931,8 @@
                   <a:srgbClr val="222733"/>
                 </a:solidFill>
                 <a:latin typeface="맑은 고딕"/>
+                <a:ea typeface="맑은 고딕"/>
+                <a:cs typeface="맑은 고딕"/>
               </a:rPr>
               <a:t>Terraform Cloud UI의 Runs 탭 화면 캡처(방금 실행한 이력이 보이는 화면)</a:t>
             </a:r>
@@ -5901,6 +5949,8 @@
                   <a:srgbClr val="0D9488"/>
                 </a:solidFill>
                 <a:latin typeface="맑은 고딕"/>
+                <a:ea typeface="맑은 고딕"/>
+                <a:cs typeface="맑은 고딕"/>
               </a:rPr>
               <a:t>●  </a:t>
             </a:r>
@@ -5910,6 +5960,8 @@
                   <a:srgbClr val="222733"/>
                 </a:solidFill>
                 <a:latin typeface="맑은 고딕"/>
+                <a:ea typeface="맑은 고딕"/>
+                <a:cs typeface="맑은 고딕"/>
               </a:rPr>
               <a:t>9주차(로컬 Terraform)와 10주차(Terraform Cloud) 실습을 함께 정리해서 제출</a:t>
             </a:r>
@@ -5945,6 +5997,8 @@
                   <a:srgbClr val="5B6373"/>
                 </a:solidFill>
                 <a:latin typeface="맑은 고딕"/>
+                <a:ea typeface="맑은 고딕"/>
+                <a:cs typeface="맑은 고딕"/>
               </a:rPr>
               <a:t>클라우드인프라관리  ·  10주차 3차시</a:t>
             </a:r>
@@ -5980,6 +6034,8 @@
                   <a:srgbClr val="5B6373"/>
                 </a:solidFill>
                 <a:latin typeface="맑은 고딕"/>
+                <a:ea typeface="맑은 고딕"/>
+                <a:cs typeface="맑은 고딕"/>
               </a:rPr>
               <a:t>11 / 13</a:t>
             </a:r>
@@ -6165,6 +6221,8 @@
                   <a:srgbClr val="FFFFFF"/>
                 </a:solidFill>
                 <a:latin typeface="맑은 고딕"/>
+                <a:ea typeface="맑은 고딕"/>
+                <a:cs typeface="맑은 고딕"/>
               </a:rPr>
               <a:t>오늘의 정리</a:t>
             </a:r>
@@ -6218,6 +6276,8 @@
                   <a:srgbClr val="14213D"/>
                 </a:solidFill>
                 <a:latin typeface="맑은 고딕"/>
+                <a:ea typeface="맑은 고딕"/>
+                <a:cs typeface="맑은 고딕"/>
               </a:rPr>
               <a:t>1</a:t>
             </a:r>
@@ -6253,6 +6313,8 @@
                   <a:srgbClr val="FFFFFF"/>
                 </a:solidFill>
                 <a:latin typeface="맑은 고딕"/>
+                <a:ea typeface="맑은 고딕"/>
+                <a:cs typeface="맑은 고딕"/>
               </a:rPr>
               <a:t>원격 실행은 학생 로컬 자원에 접근할 수 없으므로, random_pet처럼 로컬에 의존하지 않는 리소스로 검증한다</a:t>
             </a:r>
@@ -6306,6 +6368,8 @@
                   <a:srgbClr val="14213D"/>
                 </a:solidFill>
                 <a:latin typeface="맑은 고딕"/>
+                <a:ea typeface="맑은 고딕"/>
+                <a:cs typeface="맑은 고딕"/>
               </a:rPr>
               <a:t>2</a:t>
             </a:r>
@@ -6341,6 +6405,8 @@
                   <a:srgbClr val="FFFFFF"/>
                 </a:solidFill>
                 <a:latin typeface="맑은 고딕"/>
+                <a:ea typeface="맑은 고딕"/>
+                <a:cs typeface="맑은 고딕"/>
               </a:rPr>
               <a:t>코드를 GitHub에 push하고 워크스페이스와 연결하면, Terraform Cloud가 자동으로 plan·apply를 원격 실행한다</a:t>
             </a:r>
@@ -6482,6 +6548,8 @@
                   <a:srgbClr val="FFFFFF"/>
                 </a:solidFill>
                 <a:latin typeface="맑은 고딕"/>
+                <a:ea typeface="맑은 고딕"/>
+                <a:cs typeface="맑은 고딕"/>
               </a:rPr>
               <a:t>다음 주 예고</a:t>
             </a:r>
@@ -6517,6 +6585,8 @@
                   <a:srgbClr val="14B8A6"/>
                 </a:solidFill>
                 <a:latin typeface="맑은 고딕"/>
+                <a:ea typeface="맑은 고딕"/>
+                <a:cs typeface="맑은 고딕"/>
               </a:rPr>
               <a:t>다음 차시 예고 — 11주차 — Jenkins CI/CD 서버 구축</a:t>
             </a:r>
@@ -6552,6 +6622,8 @@
                   <a:srgbClr val="FFFFFF"/>
                 </a:solidFill>
                 <a:latin typeface="맑은 고딕"/>
+                <a:ea typeface="맑은 고딕"/>
+                <a:cs typeface="맑은 고딕"/>
               </a:rPr>
               <a:t>이번엔 인프라가 아니라 '빌드와 배포'를 자동화하는 도구, Jenkins를 배웁니다. Docker Compose로 Jenkins를 영구 설치해봅니다.</a:t>
             </a:r>
@@ -6737,6 +6809,8 @@
                   <a:srgbClr val="14B8A6"/>
                 </a:solidFill>
                 <a:latin typeface="맑은 고딕"/>
+                <a:ea typeface="맑은 고딕"/>
+                <a:cs typeface="맑은 고딕"/>
               </a:rPr>
               <a:t>10주차, 그리고 Terraform 단원을 마치며</a:t>
             </a:r>
@@ -6772,6 +6846,8 @@
                   <a:srgbClr val="FFFFFF"/>
                 </a:solidFill>
                 <a:latin typeface="맑은 고딕"/>
+                <a:ea typeface="맑은 고딕"/>
+                <a:cs typeface="맑은 고딕"/>
               </a:rPr>
               <a:t>수고하셨습니다!</a:t>
             </a:r>
@@ -6811,6 +6887,8 @@
                   <a:srgbClr val="C9D3E6"/>
                 </a:solidFill>
                 <a:latin typeface="맑은 고딕"/>
+                <a:ea typeface="맑은 고딕"/>
+                <a:cs typeface="맑은 고딕"/>
               </a:rPr>
               <a:t>로컬 Terraform부터 Terraform Cloud 원격 실행까지, IaC의 핵심을 완주하셨습니다. 다음 주부터는 Jenkins CI/CD가 시작됩니다.</a:t>
             </a:r>
@@ -6952,6 +7030,8 @@
                   <a:srgbClr val="14B8A6"/>
                 </a:solidFill>
                 <a:latin typeface="맑은 고딕"/>
+                <a:ea typeface="맑은 고딕"/>
+                <a:cs typeface="맑은 고딕"/>
               </a:rPr>
               <a:t>SESSION OVERVIEW</a:t>
             </a:r>
@@ -6987,6 +7067,8 @@
                   <a:srgbClr val="FFFFFF"/>
                 </a:solidFill>
                 <a:latin typeface="맑은 고딕"/>
+                <a:ea typeface="맑은 고딕"/>
+                <a:cs typeface="맑은 고딕"/>
               </a:rPr>
               <a:t>오늘의 학습 목표</a:t>
             </a:r>
@@ -7026,6 +7108,8 @@
                   <a:srgbClr val="222733"/>
                 </a:solidFill>
                 <a:latin typeface="맑은 고딕"/>
+                <a:ea typeface="맑은 고딕"/>
+                <a:cs typeface="맑은 고딕"/>
               </a:rPr>
               <a:t>1.  왜 9주차 예제(docker_container) 대신 random_pet을 쓰는지 이해한다</a:t>
             </a:r>
@@ -7042,6 +7126,8 @@
                   <a:srgbClr val="222733"/>
                 </a:solidFill>
                 <a:latin typeface="맑은 고딕"/>
+                <a:ea typeface="맑은 고딕"/>
+                <a:cs typeface="맑은 고딕"/>
               </a:rPr>
               <a:t>2.  워크스페이스에서 원격 apply를 실행하고 결과를 확인한다</a:t>
             </a:r>
@@ -7058,6 +7144,8 @@
                   <a:srgbClr val="222733"/>
                 </a:solidFill>
                 <a:latin typeface="맑은 고딕"/>
+                <a:ea typeface="맑은 고딕"/>
+                <a:cs typeface="맑은 고딕"/>
               </a:rPr>
               <a:t>3.  Terraform Cloud UI의 Runs 탭에서 실행 이력을 확인한다</a:t>
             </a:r>
@@ -7093,6 +7181,8 @@
                   <a:srgbClr val="5B6373"/>
                 </a:solidFill>
                 <a:latin typeface="맑은 고딕"/>
+                <a:ea typeface="맑은 고딕"/>
+                <a:cs typeface="맑은 고딕"/>
               </a:rPr>
               <a:t>클라우드인프라관리  ·  10주차 3차시</a:t>
             </a:r>
@@ -7128,6 +7218,8 @@
                   <a:srgbClr val="5B6373"/>
                 </a:solidFill>
                 <a:latin typeface="맑은 고딕"/>
+                <a:ea typeface="맑은 고딕"/>
+                <a:cs typeface="맑은 고딕"/>
               </a:rPr>
               <a:t>02 / 13</a:t>
             </a:r>
@@ -7313,6 +7405,8 @@
                   <a:srgbClr val="14B8A6"/>
                 </a:solidFill>
                 <a:latin typeface="맑은 고딕"/>
+                <a:ea typeface="맑은 고딕"/>
+                <a:cs typeface="맑은 고딕"/>
               </a:rPr>
               <a:t>SESSION OVERVIEW</a:t>
             </a:r>
@@ -7348,6 +7442,8 @@
                   <a:srgbClr val="FFFFFF"/>
                 </a:solidFill>
                 <a:latin typeface="맑은 고딕"/>
+                <a:ea typeface="맑은 고딕"/>
+                <a:cs typeface="맑은 고딕"/>
               </a:rPr>
               <a:t>오늘의 진행 순서</a:t>
             </a:r>
@@ -7559,6 +7655,8 @@
                   <a:srgbClr val="FFFFFF"/>
                 </a:solidFill>
                 <a:latin typeface="맑은 고딕"/>
+                <a:ea typeface="맑은 고딕"/>
+                <a:cs typeface="맑은 고딕"/>
               </a:rPr>
               <a:t>1</a:t>
             </a:r>
@@ -7642,6 +7740,8 @@
                   <a:srgbClr val="14213D"/>
                 </a:solidFill>
                 <a:latin typeface="맑은 고딕"/>
+                <a:ea typeface="맑은 고딕"/>
+                <a:cs typeface="맑은 고딕"/>
               </a:rPr>
               <a:t>개념 설명</a:t>
             </a:r>
@@ -7681,6 +7781,8 @@
                   <a:srgbClr val="222733"/>
                 </a:solidFill>
                 <a:latin typeface="맑은 고딕"/>
+                <a:ea typeface="맑은 고딕"/>
+                <a:cs typeface="맑은 고딕"/>
               </a:rPr>
               <a:t>강의자료 기반 직접 강의</a:t>
             </a:r>
@@ -7760,6 +7862,8 @@
                   <a:srgbClr val="FFFFFF"/>
                 </a:solidFill>
                 <a:latin typeface="맑은 고딕"/>
+                <a:ea typeface="맑은 고딕"/>
+                <a:cs typeface="맑은 고딕"/>
               </a:rPr>
               <a:t>2</a:t>
             </a:r>
@@ -7843,6 +7947,8 @@
                   <a:srgbClr val="14213D"/>
                 </a:solidFill>
                 <a:latin typeface="맑은 고딕"/>
+                <a:ea typeface="맑은 고딕"/>
+                <a:cs typeface="맑은 고딕"/>
               </a:rPr>
               <a:t>Killercoda</a:t>
             </a:r>
@@ -7882,6 +7988,8 @@
                   <a:srgbClr val="222733"/>
                 </a:solidFill>
                 <a:latin typeface="맑은 고딕"/>
+                <a:ea typeface="맑은 고딕"/>
+                <a:cs typeface="맑은 고딕"/>
               </a:rPr>
               <a:t>원격 실행 결과 확인</a:t>
             </a:r>
@@ -7961,6 +8069,8 @@
                   <a:srgbClr val="FFFFFF"/>
                 </a:solidFill>
                 <a:latin typeface="맑은 고딕"/>
+                <a:ea typeface="맑은 고딕"/>
+                <a:cs typeface="맑은 고딕"/>
               </a:rPr>
               <a:t>3</a:t>
             </a:r>
@@ -8044,6 +8154,8 @@
                   <a:srgbClr val="14213D"/>
                 </a:solidFill>
                 <a:latin typeface="맑은 고딕"/>
+                <a:ea typeface="맑은 고딕"/>
+                <a:cs typeface="맑은 고딕"/>
               </a:rPr>
               <a:t>VM 안내</a:t>
             </a:r>
@@ -8083,6 +8195,8 @@
                   <a:srgbClr val="222733"/>
                 </a:solidFill>
                 <a:latin typeface="맑은 고딕"/>
+                <a:ea typeface="맑은 고딕"/>
+                <a:cs typeface="맑은 고딕"/>
               </a:rPr>
               <a:t>실제 원격 apply 실습</a:t>
             </a:r>
@@ -8162,6 +8276,8 @@
                   <a:srgbClr val="FFFFFF"/>
                 </a:solidFill>
                 <a:latin typeface="맑은 고딕"/>
+                <a:ea typeface="맑은 고딕"/>
+                <a:cs typeface="맑은 고딕"/>
               </a:rPr>
               <a:t>4</a:t>
             </a:r>
@@ -8245,6 +8361,8 @@
                   <a:srgbClr val="14213D"/>
                 </a:solidFill>
                 <a:latin typeface="맑은 고딕"/>
+                <a:ea typeface="맑은 고딕"/>
+                <a:cs typeface="맑은 고딕"/>
               </a:rPr>
               <a:t>결과 제출</a:t>
             </a:r>
@@ -8284,6 +8402,8 @@
                   <a:srgbClr val="222733"/>
                 </a:solidFill>
                 <a:latin typeface="맑은 고딕"/>
+                <a:ea typeface="맑은 고딕"/>
+                <a:cs typeface="맑은 고딕"/>
               </a:rPr>
               <a:t>9~10주 통합 제출</a:t>
             </a:r>
@@ -8319,6 +8439,8 @@
                   <a:srgbClr val="5B6373"/>
                 </a:solidFill>
                 <a:latin typeface="맑은 고딕"/>
+                <a:ea typeface="맑은 고딕"/>
+                <a:cs typeface="맑은 고딕"/>
               </a:rPr>
               <a:t>클라우드인프라관리  ·  10주차 3차시</a:t>
             </a:r>
@@ -8354,6 +8476,8 @@
                   <a:srgbClr val="5B6373"/>
                 </a:solidFill>
                 <a:latin typeface="맑은 고딕"/>
+                <a:ea typeface="맑은 고딕"/>
+                <a:cs typeface="맑은 고딕"/>
               </a:rPr>
               <a:t>03 / 13</a:t>
             </a:r>
@@ -8557,6 +8681,8 @@
                   <a:srgbClr val="14213D"/>
                 </a:solidFill>
                 <a:latin typeface="맑은 고딕"/>
+                <a:ea typeface="맑은 고딕"/>
+                <a:cs typeface="맑은 고딕"/>
               </a:rPr>
               <a:t>PART 01</a:t>
             </a:r>
@@ -8592,6 +8718,8 @@
                   <a:srgbClr val="FFFFFF"/>
                 </a:solidFill>
                 <a:latin typeface="맑은 고딕"/>
+                <a:ea typeface="맑은 고딕"/>
+                <a:cs typeface="맑은 고딕"/>
               </a:rPr>
               <a:t>왜 random_pet을 쓰는가</a:t>
             </a:r>
@@ -8627,6 +8755,8 @@
                   <a:srgbClr val="C9D3E6"/>
                 </a:solidFill>
                 <a:latin typeface="맑은 고딕"/>
+                <a:ea typeface="맑은 고딕"/>
+                <a:cs typeface="맑은 고딕"/>
               </a:rPr>
               <a:t>로컬 인프라에 의존하지 않는 예제</a:t>
             </a:r>
@@ -8786,6 +8916,8 @@
                   <a:srgbClr val="14213D"/>
                 </a:solidFill>
                 <a:latin typeface="맑은 고딕"/>
+                <a:ea typeface="맑은 고딕"/>
+                <a:cs typeface="맑은 고딕"/>
               </a:rPr>
               <a:t>01</a:t>
             </a:r>
@@ -8821,6 +8953,8 @@
                   <a:srgbClr val="14B8A6"/>
                 </a:solidFill>
                 <a:latin typeface="맑은 고딕"/>
+                <a:ea typeface="맑은 고딕"/>
+                <a:cs typeface="맑은 고딕"/>
               </a:rPr>
               <a:t>PART 1 · 예제 선택 이유</a:t>
             </a:r>
@@ -8856,6 +8990,8 @@
                   <a:srgbClr val="FFFFFF"/>
                 </a:solidFill>
                 <a:latin typeface="맑은 고딕"/>
+                <a:ea typeface="맑은 고딕"/>
+                <a:cs typeface="맑은 고딕"/>
               </a:rPr>
               <a:t>9주차 예제를 그대로 쓰면 생기는 문제</a:t>
             </a:r>
@@ -8895,6 +9031,8 @@
                   <a:srgbClr val="0D9488"/>
                 </a:solidFill>
                 <a:latin typeface="맑은 고딕"/>
+                <a:ea typeface="맑은 고딕"/>
+                <a:cs typeface="맑은 고딕"/>
               </a:rPr>
               <a:t>●  </a:t>
             </a:r>
@@ -8904,6 +9042,8 @@
                   <a:srgbClr val="222733"/>
                 </a:solidFill>
                 <a:latin typeface="맑은 고딕"/>
+                <a:ea typeface="맑은 고딕"/>
+                <a:cs typeface="맑은 고딕"/>
               </a:rPr>
               <a:t>9주차 docker_container 예제를 그대로 원격 실행하면 Docker 데몬에 접근할 수 없어 오류가 남</a:t>
             </a:r>
@@ -8920,6 +9060,8 @@
                   <a:srgbClr val="0D9488"/>
                 </a:solidFill>
                 <a:latin typeface="맑은 고딕"/>
+                <a:ea typeface="맑은 고딕"/>
+                <a:cs typeface="맑은 고딕"/>
               </a:rPr>
               <a:t>●  </a:t>
             </a:r>
@@ -8929,6 +9071,8 @@
                   <a:srgbClr val="222733"/>
                 </a:solidFill>
                 <a:latin typeface="맑은 고딕"/>
+                <a:ea typeface="맑은 고딕"/>
+                <a:cs typeface="맑은 고딕"/>
               </a:rPr>
               <a:t>"Cannot connect to the Docker daemon" — Terraform Cloud 서버는 학생 VM의 로컬 자원에 접근 불가</a:t>
             </a:r>
@@ -8945,6 +9089,8 @@
                   <a:srgbClr val="0D9488"/>
                 </a:solidFill>
                 <a:latin typeface="맑은 고딕"/>
+                <a:ea typeface="맑은 고딕"/>
+                <a:cs typeface="맑은 고딕"/>
               </a:rPr>
               <a:t>●  </a:t>
             </a:r>
@@ -8954,6 +9100,8 @@
                   <a:srgbClr val="222733"/>
                 </a:solidFill>
                 <a:latin typeface="맑은 고딕"/>
+                <a:ea typeface="맑은 고딕"/>
+                <a:cs typeface="맑은 고딕"/>
               </a:rPr>
               <a:t>그래서 오늘은 로컬 인프라에 전혀 의존하지 않는 random Provider를 사용</a:t>
             </a:r>
@@ -9033,6 +9181,8 @@
                   <a:srgbClr val="FFFFFF"/>
                 </a:solidFill>
                 <a:latin typeface="맑은 고딕"/>
+                <a:ea typeface="맑은 고딕"/>
+                <a:cs typeface="맑은 고딕"/>
               </a:rPr>
               <a:t>🧩  random_pet 리소스</a:t>
             </a:r>
@@ -9068,6 +9218,8 @@
                   <a:srgbClr val="FFFFFF"/>
                 </a:solidFill>
                 <a:latin typeface="맑은 고딕"/>
+                <a:ea typeface="맑은 고딕"/>
+                <a:cs typeface="맑은 고딕"/>
               </a:rPr>
               <a:t>실제 인프라를 만들진 않지만, 무작위 이름을 생성해 원격 실행이 되는지 검증하기에 딱 맞는 예제</a:t>
             </a:r>
@@ -9103,6 +9255,8 @@
                   <a:srgbClr val="5B6373"/>
                 </a:solidFill>
                 <a:latin typeface="맑은 고딕"/>
+                <a:ea typeface="맑은 고딕"/>
+                <a:cs typeface="맑은 고딕"/>
               </a:rPr>
               <a:t>클라우드인프라관리  ·  10주차 3차시</a:t>
             </a:r>
@@ -9138,6 +9292,8 @@
                   <a:srgbClr val="5B6373"/>
                 </a:solidFill>
                 <a:latin typeface="맑은 고딕"/>
+                <a:ea typeface="맑은 고딕"/>
+                <a:cs typeface="맑은 고딕"/>
               </a:rPr>
               <a:t>05 / 13</a:t>
             </a:r>
@@ -9341,6 +9497,8 @@
                   <a:srgbClr val="14213D"/>
                 </a:solidFill>
                 <a:latin typeface="맑은 고딕"/>
+                <a:ea typeface="맑은 고딕"/>
+                <a:cs typeface="맑은 고딕"/>
               </a:rPr>
               <a:t>PART 02</a:t>
             </a:r>
@@ -9376,6 +9534,8 @@
                   <a:srgbClr val="FFFFFF"/>
                 </a:solidFill>
                 <a:latin typeface="맑은 고딕"/>
+                <a:ea typeface="맑은 고딕"/>
+                <a:cs typeface="맑은 고딕"/>
               </a:rPr>
               <a:t>GitHub 연동과 원격 실행</a:t>
             </a:r>
@@ -9411,6 +9571,8 @@
                   <a:srgbClr val="C9D3E6"/>
                 </a:solidFill>
                 <a:latin typeface="맑은 고딕"/>
+                <a:ea typeface="맑은 고딕"/>
+                <a:cs typeface="맑은 고딕"/>
               </a:rPr>
               <a:t>코드 → GitHub → Terraform Cloud</a:t>
             </a:r>
@@ -9570,6 +9732,8 @@
                   <a:srgbClr val="14213D"/>
                 </a:solidFill>
                 <a:latin typeface="맑은 고딕"/>
+                <a:ea typeface="맑은 고딕"/>
+                <a:cs typeface="맑은 고딕"/>
               </a:rPr>
               <a:t>02</a:t>
             </a:r>
@@ -9605,6 +9769,8 @@
                   <a:srgbClr val="14B8A6"/>
                 </a:solidFill>
                 <a:latin typeface="맑은 고딕"/>
+                <a:ea typeface="맑은 고딕"/>
+                <a:cs typeface="맑은 고딕"/>
               </a:rPr>
               <a:t>PART 2 · GitHub 연동</a:t>
             </a:r>
@@ -9640,6 +9806,8 @@
                   <a:srgbClr val="FFFFFF"/>
                 </a:solidFill>
                 <a:latin typeface="맑은 고딕"/>
+                <a:ea typeface="맑은 고딕"/>
+                <a:cs typeface="맑은 고딕"/>
               </a:rPr>
               <a:t>하이브리드 GitOps 흐름</a:t>
             </a:r>
@@ -9679,6 +9847,8 @@
                   <a:srgbClr val="0D9488"/>
                 </a:solidFill>
                 <a:latin typeface="맑은 고딕"/>
+                <a:ea typeface="맑은 고딕"/>
+                <a:cs typeface="맑은 고딕"/>
               </a:rPr>
               <a:t>●  </a:t>
             </a:r>
@@ -9688,6 +9858,8 @@
                   <a:srgbClr val="222733"/>
                 </a:solidFill>
                 <a:latin typeface="맑은 고딕"/>
+                <a:ea typeface="맑은 고딕"/>
+                <a:cs typeface="맑은 고딕"/>
               </a:rPr>
               <a:t>로컬 VM에서 코드를 작성하고 GitHub 저장소에 push</a:t>
             </a:r>
@@ -9704,6 +9876,8 @@
                   <a:srgbClr val="0D9488"/>
                 </a:solidFill>
                 <a:latin typeface="맑은 고딕"/>
+                <a:ea typeface="맑은 고딕"/>
+                <a:cs typeface="맑은 고딕"/>
               </a:rPr>
               <a:t>●  </a:t>
             </a:r>
@@ -9713,6 +9887,8 @@
                   <a:srgbClr val="222733"/>
                 </a:solidFill>
                 <a:latin typeface="맑은 고딕"/>
+                <a:ea typeface="맑은 고딕"/>
+                <a:cs typeface="맑은 고딕"/>
               </a:rPr>
               <a:t>Terraform Cloud 워크스페이스를 그 GitHub 저장소와 연결(VCS 연동)</a:t>
             </a:r>
@@ -9729,6 +9905,8 @@
                   <a:srgbClr val="0D9488"/>
                 </a:solidFill>
                 <a:latin typeface="맑은 고딕"/>
+                <a:ea typeface="맑은 고딕"/>
+                <a:cs typeface="맑은 고딕"/>
               </a:rPr>
               <a:t>●  </a:t>
             </a:r>
@@ -9738,6 +9916,8 @@
                   <a:srgbClr val="222733"/>
                 </a:solidFill>
                 <a:latin typeface="맑은 고딕"/>
+                <a:ea typeface="맑은 고딕"/>
+                <a:cs typeface="맑은 고딕"/>
               </a:rPr>
               <a:t>push가 감지되면 Terraform Cloud가 자동으로 plan을 실행 → 확인 후 apply</a:t>
             </a:r>
@@ -9773,6 +9953,8 @@
                   <a:srgbClr val="14213D"/>
                 </a:solidFill>
                 <a:latin typeface="맑은 고딕"/>
+                <a:ea typeface="맑은 고딕"/>
+                <a:cs typeface="맑은 고딕"/>
               </a:rPr>
               <a:t>10주차 완성 흐름</a:t>
             </a:r>
@@ -9852,6 +10034,8 @@
                   <a:srgbClr val="FFFFFF"/>
                 </a:solidFill>
                 <a:latin typeface="맑은 고딕"/>
+                <a:ea typeface="맑은 고딕"/>
+                <a:cs typeface="맑은 고딕"/>
               </a:rPr>
               <a:t>로컬 VM(코드 작성) → GitHub(버전관리) → Terraform Cloud(원격 실행)</a:t>
             </a:r>
@@ -9887,6 +10071,8 @@
                   <a:srgbClr val="5B6373"/>
                 </a:solidFill>
                 <a:latin typeface="맑은 고딕"/>
+                <a:ea typeface="맑은 고딕"/>
+                <a:cs typeface="맑은 고딕"/>
               </a:rPr>
               <a:t>클라우드인프라관리  ·  10주차 3차시</a:t>
             </a:r>
@@ -9922,6 +10108,8 @@
                   <a:srgbClr val="5B6373"/>
                 </a:solidFill>
                 <a:latin typeface="맑은 고딕"/>
+                <a:ea typeface="맑은 고딕"/>
+                <a:cs typeface="맑은 고딕"/>
               </a:rPr>
               <a:t>07 / 13</a:t>
             </a:r>
@@ -10125,6 +10313,8 @@
                   <a:srgbClr val="14213D"/>
                 </a:solidFill>
                 <a:latin typeface="맑은 고딕"/>
+                <a:ea typeface="맑은 고딕"/>
+                <a:cs typeface="맑은 고딕"/>
               </a:rPr>
               <a:t>02</a:t>
             </a:r>
@@ -10160,6 +10350,8 @@
                   <a:srgbClr val="14B8A6"/>
                 </a:solidFill>
                 <a:latin typeface="맑은 고딕"/>
+                <a:ea typeface="맑은 고딕"/>
+                <a:cs typeface="맑은 고딕"/>
               </a:rPr>
               <a:t>PART 2 · GitHub 연동</a:t>
             </a:r>
@@ -10195,6 +10387,8 @@
                   <a:srgbClr val="FFFFFF"/>
                 </a:solidFill>
                 <a:latin typeface="맑은 고딕"/>
+                <a:ea typeface="맑은 고딕"/>
+                <a:cs typeface="맑은 고딕"/>
               </a:rPr>
               <a:t>main.tf — random_pet 예제</a:t>
             </a:r>
@@ -10234,6 +10428,8 @@
                   <a:srgbClr val="0D9488"/>
                 </a:solidFill>
                 <a:latin typeface="맑은 고딕"/>
+                <a:ea typeface="맑은 고딕"/>
+                <a:cs typeface="맑은 고딕"/>
               </a:rPr>
               <a:t>●  </a:t>
             </a:r>
@@ -10243,6 +10439,8 @@
                   <a:srgbClr val="222733"/>
                 </a:solidFill>
                 <a:latin typeface="맑은 고딕"/>
+                <a:ea typeface="맑은 고딕"/>
+                <a:cs typeface="맑은 고딕"/>
               </a:rPr>
               <a:t>resource "random_pet" "lab" {</a:t>
             </a:r>
@@ -10259,6 +10457,8 @@
                   <a:srgbClr val="0D9488"/>
                 </a:solidFill>
                 <a:latin typeface="맑은 고딕"/>
+                <a:ea typeface="맑은 고딕"/>
+                <a:cs typeface="맑은 고딕"/>
               </a:rPr>
               <a:t>●  </a:t>
             </a:r>
@@ -10268,6 +10468,8 @@
                   <a:srgbClr val="222733"/>
                 </a:solidFill>
                 <a:latin typeface="맑은 고딕"/>
+                <a:ea typeface="맑은 고딕"/>
+                <a:cs typeface="맑은 고딕"/>
               </a:rPr>
               <a:t>  length = 2</a:t>
             </a:r>
@@ -10284,6 +10486,8 @@
                   <a:srgbClr val="0D9488"/>
                 </a:solidFill>
                 <a:latin typeface="맑은 고딕"/>
+                <a:ea typeface="맑은 고딕"/>
+                <a:cs typeface="맑은 고딕"/>
               </a:rPr>
               <a:t>●  </a:t>
             </a:r>
@@ -10293,6 +10497,8 @@
                   <a:srgbClr val="222733"/>
                 </a:solidFill>
                 <a:latin typeface="맑은 고딕"/>
+                <a:ea typeface="맑은 고딕"/>
+                <a:cs typeface="맑은 고딕"/>
               </a:rPr>
               <a:t>}</a:t>
             </a:r>
@@ -10309,6 +10515,8 @@
                   <a:srgbClr val="0D9488"/>
                 </a:solidFill>
                 <a:latin typeface="맑은 고딕"/>
+                <a:ea typeface="맑은 고딕"/>
+                <a:cs typeface="맑은 고딕"/>
               </a:rPr>
               <a:t>●  </a:t>
             </a:r>
@@ -10318,6 +10526,8 @@
                   <a:srgbClr val="222733"/>
                 </a:solidFill>
                 <a:latin typeface="맑은 고딕"/>
+                <a:ea typeface="맑은 고딕"/>
+                <a:cs typeface="맑은 고딕"/>
               </a:rPr>
               <a:t>output "pet_name" {</a:t>
             </a:r>
@@ -10334,6 +10544,8 @@
                   <a:srgbClr val="0D9488"/>
                 </a:solidFill>
                 <a:latin typeface="맑은 고딕"/>
+                <a:ea typeface="맑은 고딕"/>
+                <a:cs typeface="맑은 고딕"/>
               </a:rPr>
               <a:t>●  </a:t>
             </a:r>
@@ -10343,6 +10555,8 @@
                   <a:srgbClr val="222733"/>
                 </a:solidFill>
                 <a:latin typeface="맑은 고딕"/>
+                <a:ea typeface="맑은 고딕"/>
+                <a:cs typeface="맑은 고딕"/>
               </a:rPr>
               <a:t>  value = random_pet.lab.id</a:t>
             </a:r>
@@ -10359,6 +10573,8 @@
                   <a:srgbClr val="0D9488"/>
                 </a:solidFill>
                 <a:latin typeface="맑은 고딕"/>
+                <a:ea typeface="맑은 고딕"/>
+                <a:cs typeface="맑은 고딕"/>
               </a:rPr>
               <a:t>●  </a:t>
             </a:r>
@@ -10368,6 +10584,8 @@
                   <a:srgbClr val="222733"/>
                 </a:solidFill>
                 <a:latin typeface="맑은 고딕"/>
+                <a:ea typeface="맑은 고딕"/>
+                <a:cs typeface="맑은 고딕"/>
               </a:rPr>
               <a:t>}</a:t>
             </a:r>
@@ -10384,6 +10602,8 @@
                   <a:srgbClr val="0D9488"/>
                 </a:solidFill>
                 <a:latin typeface="맑은 고딕"/>
+                <a:ea typeface="맑은 고딕"/>
+                <a:cs typeface="맑은 고딕"/>
               </a:rPr>
               <a:t>●  </a:t>
             </a:r>
@@ -10393,6 +10613,8 @@
                   <a:srgbClr val="222733"/>
                 </a:solidFill>
                 <a:latin typeface="맑은 고딕"/>
+                <a:ea typeface="맑은 고딕"/>
+                <a:cs typeface="맑은 고딕"/>
               </a:rPr>
               <a:t>→ apply 후 terraform output으로 "grand-quail" 같은 무작위 이름 확인</a:t>
             </a:r>
@@ -10428,6 +10650,8 @@
                   <a:srgbClr val="5B6373"/>
                 </a:solidFill>
                 <a:latin typeface="맑은 고딕"/>
+                <a:ea typeface="맑은 고딕"/>
+                <a:cs typeface="맑은 고딕"/>
               </a:rPr>
               <a:t>클라우드인프라관리  ·  10주차 3차시</a:t>
             </a:r>
@@ -10463,6 +10687,8 @@
                   <a:srgbClr val="5B6373"/>
                 </a:solidFill>
                 <a:latin typeface="맑은 고딕"/>
+                <a:ea typeface="맑은 고딕"/>
+                <a:cs typeface="맑은 고딕"/>
               </a:rPr>
               <a:t>08 / 13</a:t>
             </a:r>
@@ -10666,6 +10892,8 @@
                   <a:srgbClr val="14213D"/>
                 </a:solidFill>
                 <a:latin typeface="맑은 고딕"/>
+                <a:ea typeface="맑은 고딕"/>
+                <a:cs typeface="맑은 고딕"/>
               </a:rPr>
               <a:t>02</a:t>
             </a:r>
@@ -10701,6 +10929,8 @@
                   <a:srgbClr val="14B8A6"/>
                 </a:solidFill>
                 <a:latin typeface="맑은 고딕"/>
+                <a:ea typeface="맑은 고딕"/>
+                <a:cs typeface="맑은 고딕"/>
               </a:rPr>
               <a:t>PART 2 · GitHub 연동</a:t>
             </a:r>
@@ -10736,6 +10966,8 @@
                   <a:srgbClr val="FFFFFF"/>
                 </a:solidFill>
                 <a:latin typeface="맑은 고딕"/>
+                <a:ea typeface="맑은 고딕"/>
+                <a:cs typeface="맑은 고딕"/>
               </a:rPr>
               <a:t>실행 흐름 재확인</a:t>
             </a:r>
@@ -10775,6 +11007,8 @@
                   <a:srgbClr val="0D9488"/>
                 </a:solidFill>
                 <a:latin typeface="맑은 고딕"/>
+                <a:ea typeface="맑은 고딕"/>
+                <a:cs typeface="맑은 고딕"/>
               </a:rPr>
               <a:t>●  </a:t>
             </a:r>
@@ -10784,6 +11018,8 @@
                   <a:srgbClr val="222733"/>
                 </a:solidFill>
                 <a:latin typeface="맑은 고딕"/>
+                <a:ea typeface="맑은 고딕"/>
+                <a:cs typeface="맑은 고딕"/>
               </a:rPr>
               <a:t>terraform init — cloud 블록의 워크스페이스에 연결</a:t>
             </a:r>
@@ -10800,6 +11036,8 @@
                   <a:srgbClr val="0D9488"/>
                 </a:solidFill>
                 <a:latin typeface="맑은 고딕"/>
+                <a:ea typeface="맑은 고딕"/>
+                <a:cs typeface="맑은 고딕"/>
               </a:rPr>
               <a:t>●  </a:t>
             </a:r>
@@ -10809,6 +11047,8 @@
                   <a:srgbClr val="222733"/>
                 </a:solidFill>
                 <a:latin typeface="맑은 고딕"/>
+                <a:ea typeface="맑은 고딕"/>
+                <a:cs typeface="맑은 고딕"/>
               </a:rPr>
               <a:t>terraform apply — 이 순간 실제 연산은 Terraform Cloud 서버에서 실행됨</a:t>
             </a:r>
@@ -10825,6 +11065,8 @@
                   <a:srgbClr val="0D9488"/>
                 </a:solidFill>
                 <a:latin typeface="맑은 고딕"/>
+                <a:ea typeface="맑은 고딕"/>
+                <a:cs typeface="맑은 고딕"/>
               </a:rPr>
               <a:t>●  </a:t>
             </a:r>
@@ -10834,6 +11076,8 @@
                   <a:srgbClr val="222733"/>
                 </a:solidFill>
                 <a:latin typeface="맑은 고딕"/>
+                <a:ea typeface="맑은 고딕"/>
+                <a:cs typeface="맑은 고딕"/>
               </a:rPr>
               <a:t>terraform output — 결과값(pet_name) 확인</a:t>
             </a:r>
@@ -10850,6 +11094,8 @@
                   <a:srgbClr val="0D9488"/>
                 </a:solidFill>
                 <a:latin typeface="맑은 고딕"/>
+                <a:ea typeface="맑은 고딕"/>
+                <a:cs typeface="맑은 고딕"/>
               </a:rPr>
               <a:t>●  </a:t>
             </a:r>
@@ -10859,6 +11105,8 @@
                   <a:srgbClr val="222733"/>
                 </a:solidFill>
                 <a:latin typeface="맑은 고딕"/>
+                <a:ea typeface="맑은 고딕"/>
+                <a:cs typeface="맑은 고딕"/>
               </a:rPr>
               <a:t>Terraform Cloud UI(app.terraform.io) 워크스페이스의 Runs 탭에서 방금 실행 이력 확인</a:t>
             </a:r>
@@ -10894,6 +11142,8 @@
                   <a:srgbClr val="5B6373"/>
                 </a:solidFill>
                 <a:latin typeface="맑은 고딕"/>
+                <a:ea typeface="맑은 고딕"/>
+                <a:cs typeface="맑은 고딕"/>
               </a:rPr>
               <a:t>클라우드인프라관리  ·  10주차 3차시</a:t>
             </a:r>
@@ -10929,6 +11179,8 @@
                   <a:srgbClr val="5B6373"/>
                 </a:solidFill>
                 <a:latin typeface="맑은 고딕"/>
+                <a:ea typeface="맑은 고딕"/>
+                <a:cs typeface="맑은 고딕"/>
               </a:rPr>
               <a:t>09 / 13</a:t>
             </a:r>
